--- a/presentations/5_min_vid.pptx
+++ b/presentations/5_min_vid.pptx
@@ -1,6 +1,6 @@
 
 <file path=ppt/presentation.xml><?xml version="1.0" encoding="utf-8"?>
-<p:presentation xmlns:a="http://schemas.openxmlformats.org/drawingml/2006/main" xmlns:r="http://schemas.openxmlformats.org/officeDocument/2006/relationships" xmlns:p="http://schemas.openxmlformats.org/presentationml/2006/main" embedTrueTypeFonts="1" saveSubsetFonts="1" autoCompressPictures="0">
+<p:presentation xmlns:a="http://schemas.openxmlformats.org/drawingml/2006/main" xmlns:r="http://schemas.openxmlformats.org/officeDocument/2006/relationships" xmlns:p="http://schemas.openxmlformats.org/presentationml/2006/main" firstSlideNum="2" embedTrueTypeFonts="1" saveSubsetFonts="1" autoCompressPictures="0">
   <p:sldMasterIdLst>
     <p:sldMasterId id="2147483648" r:id="rId1"/>
   </p:sldMasterIdLst>
@@ -326,7 +326,7 @@
           <a:p>
             <a:fld id="{F7021451-1387-4CA6-816F-3879F97B5CBC}" type="slidenum">
               <a:rPr lang="en-US"/>
-              <a:t>1</a:t>
+              <a:t>2</a:t>
             </a:fld>
             <a:endParaRPr lang="en-US"/>
           </a:p>
@@ -410,7 +410,7 @@
           <a:p>
             <a:fld id="{F7021451-1387-4CA6-816F-3879F97B5CBC}" type="slidenum">
               <a:rPr lang="en-US"/>
-              <a:t>2</a:t>
+              <a:t>3</a:t>
             </a:fld>
             <a:endParaRPr lang="en-US"/>
           </a:p>
@@ -494,7 +494,7 @@
           <a:p>
             <a:fld id="{F7021451-1387-4CA6-816F-3879F97B5CBC}" type="slidenum">
               <a:rPr lang="en-US"/>
-              <a:t>3</a:t>
+              <a:t>4</a:t>
             </a:fld>
             <a:endParaRPr lang="en-US"/>
           </a:p>
@@ -578,7 +578,7 @@
           <a:p>
             <a:fld id="{F7021451-1387-4CA6-816F-3879F97B5CBC}" type="slidenum">
               <a:rPr lang="en-US"/>
-              <a:t>4</a:t>
+              <a:t>5</a:t>
             </a:fld>
             <a:endParaRPr lang="en-US"/>
           </a:p>
@@ -662,7 +662,7 @@
           <a:p>
             <a:fld id="{F7021451-1387-4CA6-816F-3879F97B5CBC}" type="slidenum">
               <a:rPr lang="en-US"/>
-              <a:t>5</a:t>
+              <a:t>6</a:t>
             </a:fld>
             <a:endParaRPr lang="en-US"/>
           </a:p>
@@ -746,7 +746,7 @@
           <a:p>
             <a:fld id="{F7021451-1387-4CA6-816F-3879F97B5CBC}" type="slidenum">
               <a:rPr lang="en-US"/>
-              <a:t>6</a:t>
+              <a:t>7</a:t>
             </a:fld>
             <a:endParaRPr lang="en-US"/>
           </a:p>
@@ -830,7 +830,7 @@
           <a:p>
             <a:fld id="{F7021451-1387-4CA6-816F-3879F97B5CBC}" type="slidenum">
               <a:rPr lang="en-US"/>
-              <a:t>7</a:t>
+              <a:t>8</a:t>
             </a:fld>
             <a:endParaRPr lang="en-US"/>
           </a:p>
@@ -981,7 +981,7 @@
     <p:sldLayoutId id="2147483649" r:id="rId1"/>
     <p:sldLayoutId id="2147483650" r:id="rId2"/>
   </p:sldLayoutIdLst>
-  <p:hf sldNum="0" hdr="0" ftr="0" dt="0"/>
+  <p:hf hdr="0" ftr="0" dt="0"/>
   <p:txStyles>
     <p:titleStyle>
       <a:lvl1pPr algn="ctr" defTabSz="914400" rtl="0" eaLnBrk="1" latinLnBrk="0" hangingPunct="1">
